--- a/MARUTHI_MSME_AI_Retail_Copilot_Presentation.pptx
+++ b/MARUTHI_MSME_AI_Retail_Copilot_Presentation.pptx
@@ -5657,7 +5657,7 @@
               </a:defRPr>
             </a:pPr>
             <a:r>
-              <a:t>Seasonal &amp; Local Intelligence Engine</a:t>
+              <a:t>Seasonal/Local Intelligence &amp; Verifiable Reports</a:t>
             </a:r>
           </a:p>
         </p:txBody>
@@ -5711,7 +5711,7 @@
               </a:defRPr>
             </a:pPr>
             <a:r>
-              <a:t>📍 3-Tier Location Resolver</a:t>
+              <a:t>📍 Local &amp; Seasonal Intelligence</a:t>
             </a:r>
           </a:p>
           <a:p>
@@ -5723,7 +5723,7 @@
               </a:defRPr>
             </a:pPr>
             <a:r>
-              <a:t>• Tier 1 (Browser GPS): Geolocation detection returning 'GPS Location (GPS: 17.4375, 78.4482)'.</a:t>
+              <a:t>• 3-Tier Location Resolver: GPS Browser → Manual Locality → Default Store fallback.</a:t>
             </a:r>
           </a:p>
           <a:p>
@@ -5735,7 +5735,7 @@
               </a:defRPr>
             </a:pPr>
             <a:r>
-              <a:t>• Tier 2 (Manual Input): Manual entry fallback (e.g. 'Koramangala, Bengaluru').</a:t>
+              <a:t>• 3 Evidence Levels: [FACT] (store data), [SIGNAL] (climate &amp; festival dates), [RECOMMENDATION] (actionable advice).</a:t>
             </a:r>
           </a:p>
           <a:p>
@@ -5747,19 +5747,7 @@
               </a:defRPr>
             </a:pPr>
             <a:r>
-              <a:t>• Tier 3 (Default Shop): Default store fallback ('Sri Lakshmi General Store, Ameerpet, Hyderabad').</a:t>
-            </a:r>
-          </a:p>
-          <a:p>
-            <a:pPr>
-              <a:defRPr sz="1300">
-                <a:solidFill>
-                  <a:srgbClr val="94A3B8"/>
-                </a:solidFill>
-              </a:defRPr>
-            </a:pPr>
-            <a:r>
-              <a:t>• Honest Labeling: Always clearly displays location source badge in UI.</a:t>
+              <a:t>• Explainable Rationale: Why-reasoning provided for every stock recommendation.</a:t>
             </a:r>
           </a:p>
         </p:txBody>
@@ -5808,12 +5796,12 @@
             <a:pPr algn="ctr">
               <a:defRPr sz="1800" b="1">
                 <a:solidFill>
-                  <a:srgbClr val="F59E0B"/>
-                </a:solidFill>
-              </a:defRPr>
-            </a:pPr>
-            <a:r>
-              <a:t>🗓️ 3-Level Evidence Badges</a:t>
+                  <a:srgbClr val="10B981"/>
+                </a:solidFill>
+              </a:defRPr>
+            </a:pPr>
+            <a:r>
+              <a:t>📑 Verifiable Multi-Format Reports</a:t>
             </a:r>
           </a:p>
           <a:p>
@@ -5825,7 +5813,7 @@
               </a:defRPr>
             </a:pPr>
             <a:r>
-              <a:t>• [FACT]: Verified MARUTHI store internal sales &amp; inventory data.</a:t>
+              <a:t>• Centralized Report Service: Single backend data collector guarantees 100% numeric consistency.</a:t>
             </a:r>
           </a:p>
           <a:p>
@@ -5837,7 +5825,7 @@
               </a:defRPr>
             </a:pPr>
             <a:r>
-              <a:t>• [SIGNAL]: Verified external climate drivers &amp; upcoming Indian festival dates.</a:t>
+              <a:t>• ReportLab PDF: Formatted PDF business report with metadata &amp; stock alerts.</a:t>
             </a:r>
           </a:p>
           <a:p>
@@ -5849,7 +5837,7 @@
               </a:defRPr>
             </a:pPr>
             <a:r>
-              <a:t>• [RECOMMENDATION]: Actionable advice categorized into WHAT MAY SELL MORE, WHAT TO STOCK, &amp; AVOID OVERSTOCKING.</a:t>
+              <a:t>• openpyxl Excel: 7-sheet workbook for deep accounting audits.</a:t>
             </a:r>
           </a:p>
           <a:p>
@@ -5861,7 +5849,7 @@
               </a:defRPr>
             </a:pPr>
             <a:r>
-              <a:t>• Why-Reasoning: Explains exact business rationale for every recommendation.</a:t>
+              <a:t>• Matplotlib PNG: Clean dashboard snapshot card for instant WhatsApp sharing.</a:t>
             </a:r>
           </a:p>
         </p:txBody>
@@ -5922,7 +5910,7 @@
               </a:defRPr>
             </a:pPr>
             <a:r>
-              <a:t>FEATURE DEEP DIVE</a:t>
+              <a:t>PRODUCT ROADMAP &amp; FUTURE SCOPE</a:t>
             </a:r>
           </a:p>
         </p:txBody>
@@ -5957,7 +5945,7 @@
               </a:defRPr>
             </a:pPr>
             <a:r>
-              <a:t>Verifiable Multi-Format Business Reports</a:t>
+              <a:t>TODAY → NEXT → SCALE → VISION Roadmap</a:t>
             </a:r>
           </a:p>
         </p:txBody>
@@ -5970,8 +5958,62 @@
         </p:nvSpPr>
         <p:spPr>
           <a:xfrm>
-            <a:off x="731520" y="1645920"/>
-            <a:ext cx="5120640" cy="2103120"/>
+            <a:off x="731520" y="1280160"/>
+            <a:ext cx="10698480" cy="411480"/>
+          </a:xfrm>
+          <a:prstGeom prst="roundRect">
+            <a:avLst/>
+          </a:prstGeom>
+          <a:solidFill>
+            <a:srgbClr val="1E3A8A"/>
+          </a:solidFill>
+          <a:ln>
+            <a:solidFill>
+              <a:srgbClr val="3B82F6"/>
+            </a:solidFill>
+          </a:ln>
+        </p:spPr>
+        <p:style>
+          <a:lnRef idx="1">
+            <a:schemeClr val="accent1"/>
+          </a:lnRef>
+          <a:fillRef idx="3">
+            <a:schemeClr val="accent1"/>
+          </a:fillRef>
+          <a:effectRef idx="2">
+            <a:schemeClr val="accent1"/>
+          </a:effectRef>
+          <a:fontRef idx="minor">
+            <a:schemeClr val="lt1"/>
+          </a:fontRef>
+        </p:style>
+        <p:txBody>
+          <a:bodyPr rtlCol="0" anchor="ctr" wrap="square"/>
+          <a:lstStyle/>
+          <a:p>
+            <a:pPr algn="ctr">
+              <a:defRPr sz="1100" b="1">
+                <a:solidFill>
+                  <a:srgbClr val="F8FAFC"/>
+                </a:solidFill>
+              </a:defRPr>
+            </a:pPr>
+            <a:r>
+              <a:t>ℹ️ Note: Features under NEXT, SCALE, and VISION represent future scope roadmap capabilities — not part of current hackathon MVP.</a:t>
+            </a:r>
+          </a:p>
+        </p:txBody>
+      </p:sp>
+      <p:sp>
+        <p:nvSpPr>
+          <p:cNvPr id="5" name="Rounded Rectangle 4"/>
+          <p:cNvSpPr/>
+          <p:nvPr/>
+        </p:nvSpPr>
+        <p:spPr>
+          <a:xfrm>
+            <a:off x="731520" y="1828800"/>
+            <a:ext cx="2560320" cy="4480560"/>
           </a:xfrm>
           <a:prstGeom prst="roundRect">
             <a:avLst/>
@@ -6004,40 +6046,60 @@
           <a:lstStyle/>
           <a:p>
             <a:pPr algn="ctr">
-              <a:defRPr sz="1800" b="1">
-                <a:solidFill>
-                  <a:srgbClr val="EF4444"/>
-                </a:solidFill>
-              </a:defRPr>
-            </a:pPr>
-            <a:r>
-              <a:t>PDF Business Report</a:t>
-            </a:r>
-          </a:p>
-          <a:p>
-            <a:pPr>
-              <a:defRPr sz="1300">
+              <a:defRPr sz="1400" b="1">
+                <a:solidFill>
+                  <a:srgbClr val="10B981"/>
+                </a:solidFill>
+              </a:defRPr>
+            </a:pPr>
+            <a:r>
+              <a:t>1. TODAY — WORKING MVP</a:t>
+            </a:r>
+          </a:p>
+          <a:p>
+            <a:pPr>
+              <a:defRPr sz="1100">
                 <a:solidFill>
                   <a:srgbClr val="94A3B8"/>
                 </a:solidFill>
               </a:defRPr>
             </a:pPr>
             <a:r>
-              <a:t>ReportLab engine generating formatted PDF report with store metadata, financial summary, stock alerts, and AI advisor priority actions.</a:t>
-            </a:r>
-          </a:p>
-        </p:txBody>
-      </p:sp>
-      <p:sp>
-        <p:nvSpPr>
-          <p:cNvPr id="5" name="Rounded Rectangle 4"/>
+              <a:t>• Natural Sales &amp; Voice Capture</a:t>
+            </a:r>
+            <a:br/>
+            <a:r>
+              <a:t>• AI Wholesale Invoice OCR</a:t>
+            </a:r>
+            <a:br/>
+            <a:r>
+              <a:t>• Deterministic Financials</a:t>
+            </a:r>
+            <a:br/>
+            <a:r>
+              <a:t>• Real-Time BI &amp; Demand Forecast</a:t>
+            </a:r>
+            <a:br/>
+            <a:r>
+              <a:t>• Grounded AI Advisor &amp; Local Intel</a:t>
+            </a:r>
+            <a:br/>
+            <a:r>
+              <a:t>• PDF / XLSX / PNG Reports</a:t>
+            </a:r>
+          </a:p>
+        </p:txBody>
+      </p:sp>
+      <p:sp>
+        <p:nvSpPr>
+          <p:cNvPr id="6" name="Rounded Rectangle 5"/>
           <p:cNvSpPr/>
           <p:nvPr/>
         </p:nvSpPr>
         <p:spPr>
           <a:xfrm>
-            <a:off x="6126480" y="1645920"/>
-            <a:ext cx="5120640" cy="2103120"/>
+            <a:off x="3429000" y="1828800"/>
+            <a:ext cx="2560320" cy="4480560"/>
           </a:xfrm>
           <a:prstGeom prst="roundRect">
             <a:avLst/>
@@ -6070,40 +6132,56 @@
           <a:lstStyle/>
           <a:p>
             <a:pPr algn="ctr">
-              <a:defRPr sz="1800" b="1">
-                <a:solidFill>
-                  <a:srgbClr val="10B981"/>
-                </a:solidFill>
-              </a:defRPr>
-            </a:pPr>
-            <a:r>
-              <a:t>Excel (XLSX) Report</a:t>
-            </a:r>
-          </a:p>
-          <a:p>
-            <a:pPr>
-              <a:defRPr sz="1300">
+              <a:defRPr sz="1400" b="1">
+                <a:solidFill>
+                  <a:srgbClr val="3B82F6"/>
+                </a:solidFill>
+              </a:defRPr>
+            </a:pPr>
+            <a:r>
+              <a:t>2. NEXT — PRODUCT SCALE</a:t>
+            </a:r>
+          </a:p>
+          <a:p>
+            <a:pPr>
+              <a:defRPr sz="1100">
                 <a:solidFill>
                   <a:srgbClr val="94A3B8"/>
                 </a:solidFill>
               </a:defRPr>
             </a:pPr>
             <a:r>
-              <a:t>openpyxl 7-sheet workbook (Overview, Products, Inventory, Sales, Forecasting, Advisor, Intelligence) for deep accounting audits.</a:t>
-            </a:r>
-          </a:p>
-        </p:txBody>
-      </p:sp>
-      <p:sp>
-        <p:nvSpPr>
-          <p:cNvPr id="6" name="Rounded Rectangle 5"/>
+              <a:t>• Production PostgreSQL/Supabase DB</a:t>
+            </a:r>
+            <a:br/>
+            <a:r>
+              <a:t>• Multi-Shop Tenant Architecture</a:t>
+            </a:r>
+            <a:br/>
+            <a:r>
+              <a:t>• Indian Language Support (Hindi, etc.)</a:t>
+            </a:r>
+            <a:br/>
+            <a:r>
+              <a:t>• Offline-First PWA Sync (IndexedDB)</a:t>
+            </a:r>
+            <a:br/>
+            <a:r>
+              <a:t>• Dynamic Multi-LLM Model Routing</a:t>
+            </a:r>
+          </a:p>
+        </p:txBody>
+      </p:sp>
+      <p:sp>
+        <p:nvSpPr>
+          <p:cNvPr id="7" name="Rounded Rectangle 6"/>
           <p:cNvSpPr/>
           <p:nvPr/>
         </p:nvSpPr>
         <p:spPr>
           <a:xfrm>
-            <a:off x="731520" y="4023360"/>
-            <a:ext cx="5120640" cy="2103120"/>
+            <a:off x="6126480" y="1828800"/>
+            <a:ext cx="2560320" cy="4480560"/>
           </a:xfrm>
           <a:prstGeom prst="roundRect">
             <a:avLst/>
@@ -6136,40 +6214,52 @@
           <a:lstStyle/>
           <a:p>
             <a:pPr algn="ctr">
-              <a:defRPr sz="1800" b="1">
-                <a:solidFill>
-                  <a:srgbClr val="3B82F6"/>
-                </a:solidFill>
-              </a:defRPr>
-            </a:pPr>
-            <a:r>
-              <a:t>PNG Snapshot Card</a:t>
-            </a:r>
-          </a:p>
-          <a:p>
-            <a:pPr>
-              <a:defRPr sz="1300">
+              <a:defRPr sz="1400" b="1">
+                <a:solidFill>
+                  <a:srgbClr val="F59E0B"/>
+                </a:solidFill>
+              </a:defRPr>
+            </a:pPr>
+            <a:r>
+              <a:t>3. SCALE — RETAIL ECOSYSTEM</a:t>
+            </a:r>
+          </a:p>
+          <a:p>
+            <a:pPr>
+              <a:defRPr sz="1100">
                 <a:solidFill>
                   <a:srgbClr val="94A3B8"/>
                 </a:solidFill>
               </a:defRPr>
             </a:pPr>
             <a:r>
-              <a:t>Matplotlib 1080px clean dashboard card for instant WhatsApp sharing with retail staff or bank loan applications.</a:t>
-            </a:r>
-          </a:p>
-        </p:txBody>
-      </p:sp>
-      <p:sp>
-        <p:nvSpPr>
-          <p:cNvPr id="7" name="Rounded Rectangle 6"/>
+              <a:t>• Supplier B2B Wholesale Sync</a:t>
+            </a:r>
+            <a:br/>
+            <a:r>
+              <a:t>• Automated Reorder PO Workflows</a:t>
+            </a:r>
+            <a:br/>
+            <a:r>
+              <a:t>• WhatsApp Business Voice Bot</a:t>
+            </a:r>
+            <a:br/>
+            <a:r>
+              <a:t>• POS, Payment Gateway &amp; Tally Sync</a:t>
+            </a:r>
+          </a:p>
+        </p:txBody>
+      </p:sp>
+      <p:sp>
+        <p:nvSpPr>
+          <p:cNvPr id="8" name="Rounded Rectangle 7"/>
           <p:cNvSpPr/>
           <p:nvPr/>
         </p:nvSpPr>
         <p:spPr>
           <a:xfrm>
-            <a:off x="6126480" y="4023360"/>
-            <a:ext cx="5120640" cy="2103120"/>
+            <a:off x="8823960" y="1828800"/>
+            <a:ext cx="2560320" cy="4480560"/>
           </a:xfrm>
           <a:prstGeom prst="roundRect">
             <a:avLst/>
@@ -6202,26 +6292,30 @@
           <a:lstStyle/>
           <a:p>
             <a:pPr algn="ctr">
-              <a:defRPr sz="1800" b="1">
-                <a:solidFill>
-                  <a:srgbClr val="F8FAFC"/>
-                </a:solidFill>
-              </a:defRPr>
-            </a:pPr>
-            <a:r>
-              <a:t>100% Numeric Consistency</a:t>
-            </a:r>
-          </a:p>
-          <a:p>
-            <a:pPr>
-              <a:defRPr sz="1300">
+              <a:defRPr sz="1400" b="1">
+                <a:solidFill>
+                  <a:srgbClr val="A855F7"/>
+                </a:solidFill>
+              </a:defRPr>
+            </a:pPr>
+            <a:r>
+              <a:t>4. VISION — RETAIL AI OS</a:t>
+            </a:r>
+          </a:p>
+          <a:p>
+            <a:pPr>
+              <a:defRPr sz="1100">
                 <a:solidFill>
                   <a:srgbClr val="94A3B8"/>
                 </a:solidFill>
               </a:defRPr>
             </a:pPr>
             <a:r>
-              <a:t>All 3 formats consume the exact same centralized report data object. Zero numeric discrepancy between PDF, Excel &amp; PNG.</a:t>
+              <a:t>"An AI Operating System for Small Retailers"</a:t>
+            </a:r>
+            <a:br/>
+            <a:r>
+              <a:t>Natural voice, text, mobile &amp; WhatsApp interface for complete sales, inventory, demand forecasting &amp; automated supplier fulfillment.</a:t>
             </a:r>
           </a:p>
         </p:txBody>
